--- a/presentation/staircase_mini_project.pptx
+++ b/presentation/staircase_mini_project.pptx
@@ -126,10 +126,33 @@
   <pc:docChgLst>
     <pc:chgData name="Samar Aqlan" userId="30060b35bde8f536" providerId="LiveId" clId="{90F113B3-10C7-4257-BFFC-F410A3DB7BB4}"/>
     <pc:docChg chg="modSld">
-      <pc:chgData name="Samar Aqlan" userId="30060b35bde8f536" providerId="LiveId" clId="{90F113B3-10C7-4257-BFFC-F410A3DB7BB4}" dt="2026-06-10T01:38:52.327" v="2" actId="1076"/>
+      <pc:chgData name="Samar Aqlan" userId="30060b35bde8f536" providerId="LiveId" clId="{90F113B3-10C7-4257-BFFC-F410A3DB7BB4}" dt="2026-06-11T00:55:35.569" v="8" actId="20577"/>
       <pc:docMkLst>
         <pc:docMk/>
       </pc:docMkLst>
+      <pc:sldChg chg="modSp mod">
+        <pc:chgData name="Samar Aqlan" userId="30060b35bde8f536" providerId="LiveId" clId="{90F113B3-10C7-4257-BFFC-F410A3DB7BB4}" dt="2026-06-11T00:55:35.569" v="8" actId="20577"/>
+        <pc:sldMkLst>
+          <pc:docMk/>
+          <pc:sldMk cId="0" sldId="259"/>
+        </pc:sldMkLst>
+        <pc:spChg chg="mod">
+          <ac:chgData name="Samar Aqlan" userId="30060b35bde8f536" providerId="LiveId" clId="{90F113B3-10C7-4257-BFFC-F410A3DB7BB4}" dt="2026-06-11T00:55:35.569" v="8" actId="20577"/>
+          <ac:spMkLst>
+            <pc:docMk/>
+            <pc:sldMk cId="0" sldId="259"/>
+            <ac:spMk id="12" creationId="{00000000-0000-0000-0000-000000000000}"/>
+          </ac:spMkLst>
+        </pc:spChg>
+        <pc:spChg chg="mod">
+          <ac:chgData name="Samar Aqlan" userId="30060b35bde8f536" providerId="LiveId" clId="{90F113B3-10C7-4257-BFFC-F410A3DB7BB4}" dt="2026-06-11T00:55:27.462" v="4" actId="20577"/>
+          <ac:spMkLst>
+            <pc:docMk/>
+            <pc:sldMk cId="0" sldId="259"/>
+            <ac:spMk id="16" creationId="{00000000-0000-0000-0000-000000000000}"/>
+          </ac:spMkLst>
+        </pc:spChg>
+      </pc:sldChg>
       <pc:sldChg chg="modSp mod">
         <pc:chgData name="Samar Aqlan" userId="30060b35bde8f536" providerId="LiveId" clId="{90F113B3-10C7-4257-BFFC-F410A3DB7BB4}" dt="2026-06-10T01:38:52.327" v="2" actId="1076"/>
         <pc:sldMkLst>
@@ -4241,7 +4264,39 @@
                 <a:ea typeface="Calibri" pitchFamily="34" charset="-122"/>
                 <a:cs typeface="Times New Roman" panose="02020603050405020304" pitchFamily="18" charset="0"/>
               </a:rPr>
-              <a:t>Iteratively fit planes — vertical risers first, then horizontal treads — with tight orientation tolerances.</a:t>
+              <a:t>Iteratively fit </a:t>
+            </a:r>
+            <a:r>
+              <a:rPr lang="en-US" sz="1600">
+                <a:latin typeface="Times New Roman" panose="02020603050405020304" pitchFamily="18" charset="0"/>
+                <a:ea typeface="Calibri" pitchFamily="34" charset="-122"/>
+                <a:cs typeface="Times New Roman" panose="02020603050405020304" pitchFamily="18" charset="0"/>
+              </a:rPr>
+              <a:t>planes - </a:t>
+            </a:r>
+            <a:r>
+              <a:rPr lang="en-US" sz="1600" dirty="0">
+                <a:latin typeface="Times New Roman" panose="02020603050405020304" pitchFamily="18" charset="0"/>
+                <a:ea typeface="Calibri" pitchFamily="34" charset="-122"/>
+                <a:cs typeface="Times New Roman" panose="02020603050405020304" pitchFamily="18" charset="0"/>
+              </a:rPr>
+              <a:t>vertical risers first, then horizontal </a:t>
+            </a:r>
+            <a:r>
+              <a:rPr lang="en-US" sz="1600">
+                <a:latin typeface="Times New Roman" panose="02020603050405020304" pitchFamily="18" charset="0"/>
+                <a:ea typeface="Calibri" pitchFamily="34" charset="-122"/>
+                <a:cs typeface="Times New Roman" panose="02020603050405020304" pitchFamily="18" charset="0"/>
+              </a:rPr>
+              <a:t>treads - </a:t>
+            </a:r>
+            <a:r>
+              <a:rPr lang="en-US" sz="1600" dirty="0">
+                <a:latin typeface="Times New Roman" panose="02020603050405020304" pitchFamily="18" charset="0"/>
+                <a:ea typeface="Calibri" pitchFamily="34" charset="-122"/>
+                <a:cs typeface="Times New Roman" panose="02020603050405020304" pitchFamily="18" charset="0"/>
+              </a:rPr>
+              <a:t>with tight orientation tolerances.</a:t>
             </a:r>
             <a:endParaRPr lang="en-US" sz="1600" dirty="0">
               <a:latin typeface="Times New Roman" panose="02020603050405020304" pitchFamily="18" charset="0"/>
